--- a/Bookly_Solution_Pitch.pptx
+++ b/Bookly_Solution_Pitch.pptx
@@ -5,15 +5,16 @@
     <p:sldMasterId id="2147483786" r:id="rId1"/>
   </p:sldMasterIdLst>
   <p:notesMasterIdLst>
-    <p:notesMasterId r:id="rId8"/>
+    <p:notesMasterId r:id="rId9"/>
   </p:notesMasterIdLst>
   <p:sldIdLst>
     <p:sldId id="261" r:id="rId2"/>
-    <p:sldId id="268" r:id="rId3"/>
-    <p:sldId id="263" r:id="rId4"/>
-    <p:sldId id="264" r:id="rId5"/>
-    <p:sldId id="265" r:id="rId6"/>
-    <p:sldId id="267" r:id="rId7"/>
+    <p:sldId id="269" r:id="rId3"/>
+    <p:sldId id="268" r:id="rId4"/>
+    <p:sldId id="263" r:id="rId5"/>
+    <p:sldId id="264" r:id="rId6"/>
+    <p:sldId id="265" r:id="rId7"/>
+    <p:sldId id="267" r:id="rId8"/>
   </p:sldIdLst>
   <p:sldSz cx="12192000" cy="6858000"/>
   <p:notesSz cx="6858000" cy="12192000"/>
@@ -253,6 +254,114 @@
         <p:cNvPr id="1" name="">
           <a:extLst>
             <a:ext uri="{FF2B5EF4-FFF2-40B4-BE49-F238E27FC236}">
+              <a16:creationId xmlns:a16="http://schemas.microsoft.com/office/drawing/2014/main" id="{AF4500D5-CE78-1368-C404-A569B37A5E3F}"/>
+            </a:ext>
+          </a:extLst>
+        </p:cNvPr>
+        <p:cNvGrpSpPr/>
+        <p:nvPr/>
+      </p:nvGrpSpPr>
+      <p:grpSpPr>
+        <a:xfrm>
+          <a:off x="0" y="0"/>
+          <a:ext cx="0" cy="0"/>
+          <a:chOff x="0" y="0"/>
+          <a:chExt cx="0" cy="0"/>
+        </a:xfrm>
+      </p:grpSpPr>
+      <p:sp>
+        <p:nvSpPr>
+          <p:cNvPr id="2" name="Slide Image Placeholder 1">
+            <a:extLst>
+              <a:ext uri="{FF2B5EF4-FFF2-40B4-BE49-F238E27FC236}">
+                <a16:creationId xmlns:a16="http://schemas.microsoft.com/office/drawing/2014/main" id="{359C157D-1C9D-29E6-E010-B3819E6E8C2A}"/>
+              </a:ext>
+            </a:extLst>
+          </p:cNvPr>
+          <p:cNvSpPr>
+            <a:spLocks noGrp="1" noRot="1" noChangeAspect="1"/>
+          </p:cNvSpPr>
+          <p:nvPr>
+            <p:ph type="sldImg"/>
+          </p:nvPr>
+        </p:nvSpPr>
+        <p:spPr/>
+      </p:sp>
+      <p:sp>
+        <p:nvSpPr>
+          <p:cNvPr id="3" name="Notes Placeholder 2">
+            <a:extLst>
+              <a:ext uri="{FF2B5EF4-FFF2-40B4-BE49-F238E27FC236}">
+                <a16:creationId xmlns:a16="http://schemas.microsoft.com/office/drawing/2014/main" id="{13D68FF7-3BB2-C2F8-3776-4A432D32E7E7}"/>
+              </a:ext>
+            </a:extLst>
+          </p:cNvPr>
+          <p:cNvSpPr>
+            <a:spLocks noGrp="1"/>
+          </p:cNvSpPr>
+          <p:nvPr>
+            <p:ph type="body" idx="1"/>
+          </p:nvPr>
+        </p:nvSpPr>
+        <p:spPr/>
+        <p:txBody>
+          <a:bodyPr/>
+          <a:lstStyle/>
+          <a:p>
+            <a:endParaRPr lang="en-US" dirty="0"/>
+          </a:p>
+        </p:txBody>
+      </p:sp>
+      <p:sp>
+        <p:nvSpPr>
+          <p:cNvPr id="4" name="Slide Number Placeholder 3">
+            <a:extLst>
+              <a:ext uri="{FF2B5EF4-FFF2-40B4-BE49-F238E27FC236}">
+                <a16:creationId xmlns:a16="http://schemas.microsoft.com/office/drawing/2014/main" id="{0D7C4D74-055A-9305-E92C-5E24BC25FCED}"/>
+              </a:ext>
+            </a:extLst>
+          </p:cNvPr>
+          <p:cNvSpPr>
+            <a:spLocks noGrp="1"/>
+          </p:cNvSpPr>
+          <p:nvPr>
+            <p:ph type="sldNum" sz="quarter" idx="10"/>
+          </p:nvPr>
+        </p:nvSpPr>
+        <p:spPr/>
+        <p:txBody>
+          <a:bodyPr/>
+          <a:lstStyle/>
+          <a:p>
+            <a:fld id="{F7021451-1387-4CA6-816F-3879F97B5CBC}" type="slidenum">
+              <a:rPr lang="en-US"/>
+              <a:t>2</a:t>
+            </a:fld>
+            <a:endParaRPr lang="en-US"/>
+          </a:p>
+        </p:txBody>
+      </p:sp>
+    </p:spTree>
+    <p:extLst>
+      <p:ext uri="{BB962C8B-B14F-4D97-AF65-F5344CB8AC3E}">
+        <p14:creationId xmlns:p14="http://schemas.microsoft.com/office/powerpoint/2010/main" val="3725585237"/>
+      </p:ext>
+    </p:extLst>
+  </p:cSld>
+  <p:clrMapOvr>
+    <a:masterClrMapping/>
+  </p:clrMapOvr>
+</p:notes>
+</file>
+
+<file path=ppt/notesSlides/notesSlide2.xml><?xml version="1.0" encoding="utf-8"?>
+<p:notes xmlns:a="http://schemas.openxmlformats.org/drawingml/2006/main" xmlns:r="http://schemas.openxmlformats.org/officeDocument/2006/relationships" xmlns:p="http://schemas.openxmlformats.org/presentationml/2006/main">
+  <p:cSld>
+    <p:spTree>
+      <p:nvGrpSpPr>
+        <p:cNvPr id="1" name="">
+          <a:extLst>
+            <a:ext uri="{FF2B5EF4-FFF2-40B4-BE49-F238E27FC236}">
               <a16:creationId xmlns:a16="http://schemas.microsoft.com/office/drawing/2014/main" id="{A0C271D8-70D9-2946-4517-2BACA558C438}"/>
             </a:ext>
           </a:extLst>
@@ -334,7 +443,7 @@
           <a:p>
             <a:fld id="{F7021451-1387-4CA6-816F-3879F97B5CBC}" type="slidenum">
               <a:rPr lang="en-US"/>
-              <a:t>2</a:t>
+              <a:t>3</a:t>
             </a:fld>
             <a:endParaRPr lang="en-US"/>
           </a:p>
@@ -353,7 +462,7 @@
 </p:notes>
 </file>
 
-<file path=ppt/notesSlides/notesSlide2.xml><?xml version="1.0" encoding="utf-8"?>
+<file path=ppt/notesSlides/notesSlide3.xml><?xml version="1.0" encoding="utf-8"?>
 <p:notes xmlns:a="http://schemas.openxmlformats.org/drawingml/2006/main" xmlns:r="http://schemas.openxmlformats.org/officeDocument/2006/relationships" xmlns:p="http://schemas.openxmlformats.org/presentationml/2006/main">
   <p:cSld>
     <p:spTree>
@@ -442,7 +551,7 @@
           <a:p>
             <a:fld id="{F7021451-1387-4CA6-816F-3879F97B5CBC}" type="slidenum">
               <a:rPr lang="en-US"/>
-              <a:t>3</a:t>
+              <a:t>4</a:t>
             </a:fld>
             <a:endParaRPr lang="en-US"/>
           </a:p>
@@ -461,7 +570,7 @@
 </p:notes>
 </file>
 
-<file path=ppt/notesSlides/notesSlide3.xml><?xml version="1.0" encoding="utf-8"?>
+<file path=ppt/notesSlides/notesSlide4.xml><?xml version="1.0" encoding="utf-8"?>
 <p:notes xmlns:a="http://schemas.openxmlformats.org/drawingml/2006/main" xmlns:r="http://schemas.openxmlformats.org/officeDocument/2006/relationships" xmlns:p="http://schemas.openxmlformats.org/presentationml/2006/main">
   <p:cSld>
     <p:spTree>
@@ -550,7 +659,7 @@
           <a:p>
             <a:fld id="{F7021451-1387-4CA6-816F-3879F97B5CBC}" type="slidenum">
               <a:rPr lang="en-US"/>
-              <a:t>4</a:t>
+              <a:t>5</a:t>
             </a:fld>
             <a:endParaRPr lang="en-US"/>
           </a:p>
@@ -569,7 +678,7 @@
 </p:notes>
 </file>
 
-<file path=ppt/notesSlides/notesSlide4.xml><?xml version="1.0" encoding="utf-8"?>
+<file path=ppt/notesSlides/notesSlide5.xml><?xml version="1.0" encoding="utf-8"?>
 <p:notes xmlns:a="http://schemas.openxmlformats.org/drawingml/2006/main" xmlns:r="http://schemas.openxmlformats.org/officeDocument/2006/relationships" xmlns:p="http://schemas.openxmlformats.org/presentationml/2006/main">
   <p:cSld>
     <p:spTree>
@@ -658,7 +767,7 @@
           <a:p>
             <a:fld id="{F7021451-1387-4CA6-816F-3879F97B5CBC}" type="slidenum">
               <a:rPr lang="en-US"/>
-              <a:t>5</a:t>
+              <a:t>6</a:t>
             </a:fld>
             <a:endParaRPr lang="en-US"/>
           </a:p>
@@ -677,7 +786,7 @@
 </p:notes>
 </file>
 
-<file path=ppt/notesSlides/notesSlide5.xml><?xml version="1.0" encoding="utf-8"?>
+<file path=ppt/notesSlides/notesSlide6.xml><?xml version="1.0" encoding="utf-8"?>
 <p:notes xmlns:a="http://schemas.openxmlformats.org/drawingml/2006/main" xmlns:r="http://schemas.openxmlformats.org/officeDocument/2006/relationships" xmlns:p="http://schemas.openxmlformats.org/presentationml/2006/main">
   <p:cSld>
     <p:spTree>
@@ -766,7 +875,7 @@
           <a:p>
             <a:fld id="{F7021451-1387-4CA6-816F-3879F97B5CBC}" type="slidenum">
               <a:rPr lang="en-US"/>
-              <a:t>6</a:t>
+              <a:t>7</a:t>
             </a:fld>
             <a:endParaRPr lang="en-US"/>
           </a:p>
@@ -990,7 +1099,7 @@
           <a:p>
             <a:fld id="{9EB47F8C-CED3-F64D-B702-DEB02823659F}" type="datetimeFigureOut">
               <a:rPr lang="en-US" smtClean="0"/>
-              <a:t>10/4/26</a:t>
+              <a:t>10/7/26</a:t>
             </a:fld>
             <a:endParaRPr lang="en-US"/>
           </a:p>
@@ -1335,7 +1444,7 @@
           <a:p>
             <a:fld id="{9EB47F8C-CED3-F64D-B702-DEB02823659F}" type="datetimeFigureOut">
               <a:rPr lang="en-US" smtClean="0"/>
-              <a:t>10/4/26</a:t>
+              <a:t>10/7/26</a:t>
             </a:fld>
             <a:endParaRPr lang="en-US"/>
           </a:p>
@@ -1616,7 +1725,7 @@
           <a:p>
             <a:fld id="{9EB47F8C-CED3-F64D-B702-DEB02823659F}" type="datetimeFigureOut">
               <a:rPr lang="en-US" smtClean="0"/>
-              <a:t>10/4/26</a:t>
+              <a:t>10/7/26</a:t>
             </a:fld>
             <a:endParaRPr lang="en-US"/>
           </a:p>
@@ -1850,7 +1959,7 @@
           <a:p>
             <a:fld id="{9EB47F8C-CED3-F64D-B702-DEB02823659F}" type="datetimeFigureOut">
               <a:rPr lang="en-US" smtClean="0"/>
-              <a:t>10/4/26</a:t>
+              <a:t>10/7/26</a:t>
             </a:fld>
             <a:endParaRPr lang="en-US"/>
           </a:p>
@@ -2140,7 +2249,7 @@
           <a:p>
             <a:fld id="{9EB47F8C-CED3-F64D-B702-DEB02823659F}" type="datetimeFigureOut">
               <a:rPr lang="en-US" smtClean="0"/>
-              <a:t>10/4/26</a:t>
+              <a:t>10/7/26</a:t>
             </a:fld>
             <a:endParaRPr lang="en-US"/>
           </a:p>
@@ -2430,7 +2539,7 @@
           <a:p>
             <a:fld id="{9EB47F8C-CED3-F64D-B702-DEB02823659F}" type="datetimeFigureOut">
               <a:rPr lang="en-US" smtClean="0"/>
-              <a:t>10/4/26</a:t>
+              <a:t>10/7/26</a:t>
             </a:fld>
             <a:endParaRPr lang="en-US"/>
           </a:p>
@@ -2838,7 +2947,7 @@
           <a:p>
             <a:fld id="{9EB47F8C-CED3-F64D-B702-DEB02823659F}" type="datetimeFigureOut">
               <a:rPr lang="en-US" smtClean="0"/>
-              <a:t>10/4/26</a:t>
+              <a:t>10/7/26</a:t>
             </a:fld>
             <a:endParaRPr lang="en-US"/>
           </a:p>
@@ -3132,7 +3241,7 @@
           <a:p>
             <a:fld id="{9EB47F8C-CED3-F64D-B702-DEB02823659F}" type="datetimeFigureOut">
               <a:rPr lang="en-US" smtClean="0"/>
-              <a:t>10/4/26</a:t>
+              <a:t>10/7/26</a:t>
             </a:fld>
             <a:endParaRPr lang="en-US"/>
           </a:p>
@@ -3407,7 +3516,7 @@
           <a:p>
             <a:fld id="{9EB47F8C-CED3-F64D-B702-DEB02823659F}" type="datetimeFigureOut">
               <a:rPr lang="en-US" smtClean="0"/>
-              <a:t>10/4/26</a:t>
+              <a:t>10/7/26</a:t>
             </a:fld>
             <a:endParaRPr lang="en-US"/>
           </a:p>
@@ -3678,7 +3787,7 @@
           <a:p>
             <a:fld id="{9EB47F8C-CED3-F64D-B702-DEB02823659F}" type="datetimeFigureOut">
               <a:rPr lang="en-US" smtClean="0"/>
-              <a:t>10/4/26</a:t>
+              <a:t>10/7/26</a:t>
             </a:fld>
             <a:endParaRPr lang="en-US"/>
           </a:p>
@@ -3911,7 +4020,7 @@
           <a:p>
             <a:fld id="{9EB47F8C-CED3-F64D-B702-DEB02823659F}" type="datetimeFigureOut">
               <a:rPr lang="en-US" smtClean="0"/>
-              <a:t>10/4/26</a:t>
+              <a:t>10/7/26</a:t>
             </a:fld>
             <a:endParaRPr lang="en-US"/>
           </a:p>
@@ -4133,7 +4242,7 @@
           <a:p>
             <a:fld id="{9EB47F8C-CED3-F64D-B702-DEB02823659F}" type="datetimeFigureOut">
               <a:rPr lang="en-US" smtClean="0"/>
-              <a:t>10/4/26</a:t>
+              <a:t>10/7/26</a:t>
             </a:fld>
             <a:endParaRPr lang="en-US"/>
           </a:p>
@@ -4387,7 +4496,7 @@
           <a:p>
             <a:fld id="{9EB47F8C-CED3-F64D-B702-DEB02823659F}" type="datetimeFigureOut">
               <a:rPr lang="en-US" smtClean="0"/>
-              <a:t>10/4/26</a:t>
+              <a:t>10/7/26</a:t>
             </a:fld>
             <a:endParaRPr lang="en-US"/>
           </a:p>
@@ -4600,7 +4709,7 @@
           <a:p>
             <a:fld id="{9EB47F8C-CED3-F64D-B702-DEB02823659F}" type="datetimeFigureOut">
               <a:rPr lang="en-US" smtClean="0"/>
-              <a:t>10/4/26</a:t>
+              <a:t>10/7/26</a:t>
             </a:fld>
             <a:endParaRPr lang="en-US"/>
           </a:p>
@@ -4882,7 +4991,7 @@
           <a:p>
             <a:fld id="{9EB47F8C-CED3-F64D-B702-DEB02823659F}" type="datetimeFigureOut">
               <a:rPr lang="en-US" smtClean="0"/>
-              <a:t>10/4/26</a:t>
+              <a:t>10/7/26</a:t>
             </a:fld>
             <a:endParaRPr lang="en-US"/>
           </a:p>
@@ -5316,7 +5425,7 @@
           <a:p>
             <a:fld id="{9EB47F8C-CED3-F64D-B702-DEB02823659F}" type="datetimeFigureOut">
               <a:rPr lang="en-US" smtClean="0"/>
-              <a:t>10/4/26</a:t>
+              <a:t>10/7/26</a:t>
             </a:fld>
             <a:endParaRPr lang="en-US"/>
           </a:p>
@@ -5472,7 +5581,7 @@
           <a:p>
             <a:fld id="{9EB47F8C-CED3-F64D-B702-DEB02823659F}" type="datetimeFigureOut">
               <a:rPr lang="en-US" smtClean="0"/>
-              <a:t>10/4/26</a:t>
+              <a:t>10/7/26</a:t>
             </a:fld>
             <a:endParaRPr lang="en-US"/>
           </a:p>
@@ -5587,7 +5696,7 @@
           <a:p>
             <a:fld id="{9EB47F8C-CED3-F64D-B702-DEB02823659F}" type="datetimeFigureOut">
               <a:rPr lang="en-US" smtClean="0"/>
-              <a:t>10/4/26</a:t>
+              <a:t>10/7/26</a:t>
             </a:fld>
             <a:endParaRPr lang="en-US"/>
           </a:p>
@@ -5831,7 +5940,7 @@
           <a:p>
             <a:fld id="{9EB47F8C-CED3-F64D-B702-DEB02823659F}" type="datetimeFigureOut">
               <a:rPr lang="en-US" smtClean="0"/>
-              <a:t>10/4/26</a:t>
+              <a:t>10/7/26</a:t>
             </a:fld>
             <a:endParaRPr lang="en-US"/>
           </a:p>
@@ -6077,7 +6186,7 @@
           <a:p>
             <a:fld id="{9EB47F8C-CED3-F64D-B702-DEB02823659F}" type="datetimeFigureOut">
               <a:rPr lang="en-US" smtClean="0"/>
-              <a:t>10/4/26</a:t>
+              <a:t>10/7/26</a:t>
             </a:fld>
             <a:endParaRPr lang="en-US"/>
           </a:p>
@@ -6468,7 +6577,7 @@
           <a:p>
             <a:fld id="{9EB47F8C-CED3-F64D-B702-DEB02823659F}" type="datetimeFigureOut">
               <a:rPr lang="en-US" smtClean="0"/>
-              <a:t>10/4/26</a:t>
+              <a:t>10/7/26</a:t>
             </a:fld>
             <a:endParaRPr lang="en-US"/>
           </a:p>
@@ -6697,7 +6806,7 @@
           <a:p>
             <a:fld id="{9EB47F8C-CED3-F64D-B702-DEB02823659F}" type="datetimeFigureOut">
               <a:rPr lang="en-US" smtClean="0"/>
-              <a:t>10/4/26</a:t>
+              <a:t>10/7/26</a:t>
             </a:fld>
             <a:endParaRPr lang="en-US"/>
           </a:p>
@@ -6883,7 +6992,7 @@
           <a:p>
             <a:fld id="{9EB47F8C-CED3-F64D-B702-DEB02823659F}" type="datetimeFigureOut">
               <a:rPr lang="en-US" smtClean="0"/>
-              <a:t>10/4/26</a:t>
+              <a:t>10/7/26</a:t>
             </a:fld>
             <a:endParaRPr lang="en-US"/>
           </a:p>
@@ -7149,7 +7258,7 @@
           <a:p>
             <a:fld id="{9EB47F8C-CED3-F64D-B702-DEB02823659F}" type="datetimeFigureOut">
               <a:rPr lang="en-US" smtClean="0"/>
-              <a:t>10/4/26</a:t>
+              <a:t>10/7/26</a:t>
             </a:fld>
             <a:endParaRPr lang="en-US"/>
           </a:p>
@@ -7499,7 +7608,7 @@
           <a:p>
             <a:fld id="{9EB47F8C-CED3-F64D-B702-DEB02823659F}" type="datetimeFigureOut">
               <a:rPr lang="en-US" smtClean="0"/>
-              <a:t>10/4/26</a:t>
+              <a:t>10/7/26</a:t>
             </a:fld>
             <a:endParaRPr lang="en-US"/>
           </a:p>
@@ -7723,7 +7832,7 @@
           <a:p>
             <a:fld id="{9EB47F8C-CED3-F64D-B702-DEB02823659F}" type="datetimeFigureOut">
               <a:rPr lang="en-US" smtClean="0"/>
-              <a:t>10/4/26</a:t>
+              <a:t>10/7/26</a:t>
             </a:fld>
             <a:endParaRPr lang="en-US"/>
           </a:p>
@@ -7942,7 +8051,7 @@
           <a:p>
             <a:fld id="{9EB47F8C-CED3-F64D-B702-DEB02823659F}" type="datetimeFigureOut">
               <a:rPr lang="en-US" smtClean="0"/>
-              <a:t>10/4/26</a:t>
+              <a:t>10/7/26</a:t>
             </a:fld>
             <a:endParaRPr lang="en-US"/>
           </a:p>
@@ -8201,7 +8310,7 @@
           <a:p>
             <a:fld id="{9EB47F8C-CED3-F64D-B702-DEB02823659F}" type="datetimeFigureOut">
               <a:rPr lang="en-US" smtClean="0"/>
-              <a:t>10/4/26</a:t>
+              <a:t>10/7/26</a:t>
             </a:fld>
             <a:endParaRPr lang="en-US"/>
           </a:p>
@@ -8677,6 +8786,210 @@
         <p:cNvPr id="1" name="">
           <a:extLst>
             <a:ext uri="{FF2B5EF4-FFF2-40B4-BE49-F238E27FC236}">
+              <a16:creationId xmlns:a16="http://schemas.microsoft.com/office/drawing/2014/main" id="{DEF98716-7234-67D1-EDE4-8EE15A0F883E}"/>
+            </a:ext>
+          </a:extLst>
+        </p:cNvPr>
+        <p:cNvGrpSpPr/>
+        <p:nvPr/>
+      </p:nvGrpSpPr>
+      <p:grpSpPr>
+        <a:xfrm>
+          <a:off x="0" y="0"/>
+          <a:ext cx="0" cy="0"/>
+          <a:chOff x="0" y="0"/>
+          <a:chExt cx="0" cy="0"/>
+        </a:xfrm>
+      </p:grpSpPr>
+      <p:sp>
+        <p:nvSpPr>
+          <p:cNvPr id="24" name="Title 23">
+            <a:extLst>
+              <a:ext uri="{FF2B5EF4-FFF2-40B4-BE49-F238E27FC236}">
+                <a16:creationId xmlns:a16="http://schemas.microsoft.com/office/drawing/2014/main" id="{3CFA7733-0BD2-124B-906B-54783AADFEA6}"/>
+              </a:ext>
+            </a:extLst>
+          </p:cNvPr>
+          <p:cNvSpPr>
+            <a:spLocks noGrp="1"/>
+          </p:cNvSpPr>
+          <p:nvPr>
+            <p:ph type="title" idx="100"/>
+          </p:nvPr>
+        </p:nvSpPr>
+        <p:spPr/>
+        <p:txBody>
+          <a:bodyPr/>
+          <a:lstStyle/>
+          <a:p>
+            <a:r>
+              <a:rPr lang="en-US" dirty="0">
+                <a:solidFill>
+                  <a:schemeClr val="tx1"/>
+                </a:solidFill>
+              </a:rPr>
+              <a:t>Proposed agenda</a:t>
+            </a:r>
+            <a:endParaRPr lang="en-US" dirty="0"/>
+          </a:p>
+        </p:txBody>
+      </p:sp>
+      <p:sp>
+        <p:nvSpPr>
+          <p:cNvPr id="22" name="Text 2">
+            <a:extLst>
+              <a:ext uri="{FF2B5EF4-FFF2-40B4-BE49-F238E27FC236}">
+                <a16:creationId xmlns:a16="http://schemas.microsoft.com/office/drawing/2014/main" id="{FF8EEFCD-B779-245D-EA0C-A1F94A7E9092}"/>
+              </a:ext>
+            </a:extLst>
+          </p:cNvPr>
+          <p:cNvSpPr txBox="1"/>
+          <p:nvPr/>
+        </p:nvSpPr>
+        <p:spPr>
+          <a:xfrm>
+            <a:off x="731520" y="3063240"/>
+            <a:ext cx="10698480" cy="731520"/>
+          </a:xfrm>
+          <a:prstGeom prst="rect">
+            <a:avLst/>
+          </a:prstGeom>
+          <a:noFill/>
+          <a:ln/>
+        </p:spPr>
+        <p:txBody>
+          <a:bodyPr wrap="square" rtlCol="0" anchor="ctr"/>
+          <a:lstStyle/>
+          <a:p>
+            <a:pPr marL="514350" indent="-514350">
+              <a:buFont typeface="+mj-lt"/>
+              <a:buAutoNum type="arabicPeriod"/>
+            </a:pPr>
+            <a:r>
+              <a:rPr lang="en-US" sz="3000" b="1" dirty="0">
+                <a:solidFill>
+                  <a:schemeClr val="tx2"/>
+                </a:solidFill>
+                <a:latin typeface="Cambria" pitchFamily="34" charset="0"/>
+              </a:rPr>
+              <a:t>Background and architecture</a:t>
+            </a:r>
+          </a:p>
+          <a:p>
+            <a:pPr marL="514350" indent="-514350">
+              <a:buFont typeface="+mj-lt"/>
+              <a:buAutoNum type="arabicPeriod"/>
+            </a:pPr>
+            <a:endParaRPr lang="en-US" sz="3000" b="1" dirty="0">
+              <a:solidFill>
+                <a:schemeClr val="tx2"/>
+              </a:solidFill>
+              <a:latin typeface="Cambria" pitchFamily="34" charset="0"/>
+            </a:endParaRPr>
+          </a:p>
+          <a:p>
+            <a:pPr marL="514350" indent="-514350">
+              <a:buFont typeface="+mj-lt"/>
+              <a:buAutoNum type="arabicPeriod"/>
+            </a:pPr>
+            <a:r>
+              <a:rPr lang="en-US" sz="3000" b="1" dirty="0">
+                <a:solidFill>
+                  <a:schemeClr val="tx2"/>
+                </a:solidFill>
+                <a:latin typeface="Cambria" pitchFamily="34" charset="0"/>
+              </a:rPr>
+              <a:t>Quick Demo</a:t>
+            </a:r>
+          </a:p>
+          <a:p>
+            <a:pPr marL="514350" indent="-514350">
+              <a:buFont typeface="+mj-lt"/>
+              <a:buAutoNum type="arabicPeriod"/>
+            </a:pPr>
+            <a:endParaRPr lang="en-US" sz="3000" b="1" dirty="0">
+              <a:solidFill>
+                <a:schemeClr val="tx2"/>
+              </a:solidFill>
+              <a:latin typeface="Cambria" pitchFamily="34" charset="0"/>
+            </a:endParaRPr>
+          </a:p>
+          <a:p>
+            <a:pPr marL="514350" indent="-514350">
+              <a:buFont typeface="+mj-lt"/>
+              <a:buAutoNum type="arabicPeriod"/>
+            </a:pPr>
+            <a:r>
+              <a:rPr lang="en-US" sz="3000" b="1" dirty="0">
+                <a:solidFill>
+                  <a:schemeClr val="tx2"/>
+                </a:solidFill>
+                <a:latin typeface="Cambria" pitchFamily="34" charset="0"/>
+              </a:rPr>
+              <a:t>Deep dive into key design decisions</a:t>
+            </a:r>
+          </a:p>
+          <a:p>
+            <a:pPr marL="514350" indent="-514350">
+              <a:buFont typeface="+mj-lt"/>
+              <a:buAutoNum type="arabicPeriod"/>
+            </a:pPr>
+            <a:endParaRPr lang="en-US" sz="3000" b="1" dirty="0">
+              <a:solidFill>
+                <a:schemeClr val="tx2"/>
+              </a:solidFill>
+              <a:latin typeface="Cambria" pitchFamily="34" charset="0"/>
+            </a:endParaRPr>
+          </a:p>
+          <a:p>
+            <a:pPr marL="514350" indent="-514350">
+              <a:buFont typeface="+mj-lt"/>
+              <a:buAutoNum type="arabicPeriod"/>
+            </a:pPr>
+            <a:r>
+              <a:rPr lang="en-US" sz="3000" b="1" dirty="0">
+                <a:solidFill>
+                  <a:schemeClr val="tx2"/>
+                </a:solidFill>
+                <a:latin typeface="Cambria" pitchFamily="34" charset="0"/>
+              </a:rPr>
+              <a:t>Decagon team grills Balram 🔥🔥🔥</a:t>
+            </a:r>
+          </a:p>
+          <a:p>
+            <a:pPr marL="514350" indent="-514350">
+              <a:buFont typeface="+mj-lt"/>
+              <a:buAutoNum type="arabicPeriod"/>
+            </a:pPr>
+            <a:endParaRPr lang="en-US" sz="3000" dirty="0">
+              <a:solidFill>
+                <a:schemeClr val="tx2"/>
+              </a:solidFill>
+            </a:endParaRPr>
+          </a:p>
+        </p:txBody>
+      </p:sp>
+    </p:spTree>
+    <p:extLst>
+      <p:ext uri="{BB962C8B-B14F-4D97-AF65-F5344CB8AC3E}">
+        <p14:creationId xmlns:p14="http://schemas.microsoft.com/office/powerpoint/2010/main" val="892732746"/>
+      </p:ext>
+    </p:extLst>
+  </p:cSld>
+  <p:clrMapOvr>
+    <a:masterClrMapping/>
+  </p:clrMapOvr>
+</p:sld>
+</file>
+
+<file path=ppt/slides/slide3.xml><?xml version="1.0" encoding="utf-8"?>
+<p:sld xmlns:a="http://schemas.openxmlformats.org/drawingml/2006/main" xmlns:r="http://schemas.openxmlformats.org/officeDocument/2006/relationships" xmlns:p="http://schemas.openxmlformats.org/presentationml/2006/main">
+  <p:cSld>
+    <p:spTree>
+      <p:nvGrpSpPr>
+        <p:cNvPr id="1" name="">
+          <a:extLst>
+            <a:ext uri="{FF2B5EF4-FFF2-40B4-BE49-F238E27FC236}">
               <a16:creationId xmlns:a16="http://schemas.microsoft.com/office/drawing/2014/main" id="{02539D23-0648-5828-E135-4BD455E55831}"/>
             </a:ext>
           </a:extLst>
@@ -9574,7 +9887,7 @@
 </p:sld>
 </file>
 
-<file path=ppt/slides/slide3.xml><?xml version="1.0" encoding="utf-8"?>
+<file path=ppt/slides/slide4.xml><?xml version="1.0" encoding="utf-8"?>
 <p:sld xmlns:a="http://schemas.openxmlformats.org/drawingml/2006/main" xmlns:r="http://schemas.openxmlformats.org/officeDocument/2006/relationships" xmlns:p="http://schemas.openxmlformats.org/presentationml/2006/main">
   <p:cSld>
     <p:spTree>
@@ -11245,7 +11558,7 @@
 </p:sld>
 </file>
 
-<file path=ppt/slides/slide4.xml><?xml version="1.0" encoding="utf-8"?>
+<file path=ppt/slides/slide5.xml><?xml version="1.0" encoding="utf-8"?>
 <p:sld xmlns:a="http://schemas.openxmlformats.org/drawingml/2006/main" xmlns:r="http://schemas.openxmlformats.org/officeDocument/2006/relationships" xmlns:p="http://schemas.openxmlformats.org/presentationml/2006/main">
   <p:cSld>
     <p:spTree>
@@ -11494,7 +11807,7 @@
             <a:fld id="{F7021451-1387-4CA6-816F-3879F97B5CBC}" type="slidenum">
               <a:rPr lang="en-US" smtClean="0"/>
               <a:pPr algn="l"/>
-              <a:t>4</a:t>
+              <a:t>5</a:t>
             </a:fld>
             <a:endParaRPr lang="en-US"/>
           </a:p>
@@ -11615,7 +11928,7 @@
                   <a:schemeClr val="tx2"/>
                 </a:solidFill>
               </a:rPr>
-              <a:t>What we chose</a:t>
+              <a:t>What I chose</a:t>
             </a:r>
             <a:endParaRPr lang="en-US" sz="1700" dirty="0">
               <a:solidFill>
@@ -11810,7 +12123,7 @@
                   <a:schemeClr val="tx2"/>
                 </a:solidFill>
               </a:rPr>
-              <a:t>What we traded off</a:t>
+              <a:t>What I traded off</a:t>
             </a:r>
             <a:endParaRPr lang="en-US" sz="1700" dirty="0">
               <a:solidFill>
@@ -12206,7 +12519,7 @@
 </p:sld>
 </file>
 
-<file path=ppt/slides/slide5.xml><?xml version="1.0" encoding="utf-8"?>
+<file path=ppt/slides/slide6.xml><?xml version="1.0" encoding="utf-8"?>
 <p:sld xmlns:a="http://schemas.openxmlformats.org/drawingml/2006/main" xmlns:r="http://schemas.openxmlformats.org/officeDocument/2006/relationships" xmlns:p="http://schemas.openxmlformats.org/presentationml/2006/main">
   <p:cSld>
     <p:spTree>
@@ -12459,7 +12772,7 @@
             <a:fld id="{F7021451-1387-4CA6-816F-3879F97B5CBC}" type="slidenum">
               <a:rPr lang="en-US" smtClean="0"/>
               <a:pPr algn="l"/>
-              <a:t>5</a:t>
+              <a:t>6</a:t>
             </a:fld>
             <a:endParaRPr lang="en-US"/>
           </a:p>
@@ -12545,7 +12858,7 @@
                   <a:schemeClr val="tx2"/>
                 </a:solidFill>
               </a:rPr>
-              <a:t>What we chose</a:t>
+              <a:t>What I chose</a:t>
             </a:r>
             <a:endParaRPr lang="en-US" sz="1700" dirty="0">
               <a:solidFill>
@@ -12635,7 +12948,7 @@
                   <a:schemeClr val="tx2"/>
                 </a:solidFill>
               </a:rPr>
-              <a:t>What we traded off</a:t>
+              <a:t>What I traded off</a:t>
             </a:r>
             <a:endParaRPr lang="en-US" sz="1700" dirty="0">
               <a:solidFill>
@@ -13142,7 +13455,7 @@
 </p:sld>
 </file>
 
-<file path=ppt/slides/slide6.xml><?xml version="1.0" encoding="utf-8"?>
+<file path=ppt/slides/slide7.xml><?xml version="1.0" encoding="utf-8"?>
 <p:sld xmlns:a="http://schemas.openxmlformats.org/drawingml/2006/main" xmlns:r="http://schemas.openxmlformats.org/officeDocument/2006/relationships" xmlns:p="http://schemas.openxmlformats.org/presentationml/2006/main">
   <p:cSld>
     <p:spTree>
@@ -13330,7 +13643,7 @@
             <a:fld id="{F7021451-1387-4CA6-816F-3879F97B5CBC}" type="slidenum">
               <a:rPr lang="en-US" smtClean="0"/>
               <a:pPr algn="l"/>
-              <a:t>6</a:t>
+              <a:t>7</a:t>
             </a:fld>
             <a:endParaRPr lang="en-US"/>
           </a:p>
@@ -13770,7 +14083,7 @@
                   <a:schemeClr val="tx2"/>
                 </a:solidFill>
               </a:rPr>
-              <a:t>Other things we'd prioritize next</a:t>
+              <a:t>Other things I'd prioritize next</a:t>
             </a:r>
             <a:endParaRPr lang="en-US" sz="1500" dirty="0">
               <a:solidFill>
